--- a/docs/AI과제_발표자료_문서규칙점검기.pptx
+++ b/docs/AI과제_발표자료_문서규칙점검기.pptx
@@ -116,31 +116,31 @@
   <p:extLst>
     <p:ext uri="{521415D9-36F7-43E2-AB2F-B90AF26B5E84}">
       <p14:sectionLst xmlns:p14="http://schemas.microsoft.com/office/powerpoint/2010/main">
-        <p14:section name="표지" id="{2f1781ce-a77b-a508-7193-714cb2204833}">
+        <p14:section name="표지" id="{15d9f6e1-2d52-48f5-d92e-d74bf8348a70}">
           <p14:sldIdLst>
             <p14:sldId id="256"/>
           </p14:sldIdLst>
         </p14:section>
-        <p14:section name="문제 및 서비스 개요" id="{34348261-5f42-b9f8-0df7-cba196536dd8}">
+        <p14:section name="문제 및 서비스 개요" id="{c5fe1729-d149-706c-2c35-06b60d536560}">
           <p14:sldIdLst>
             <p14:sldId id="257"/>
             <p14:sldId id="258"/>
           </p14:sldIdLst>
         </p14:section>
-        <p14:section name="주요 기능과 이용 흐름" id="{abbf10d6-2d0f-d044-d067-81d2c5203254}">
+        <p14:section name="주요 기능과 이용 흐름" id="{85285fbb-8351-7f9f-b4b7-355d678d0d8c}">
           <p14:sldIdLst>
             <p14:sldId id="259"/>
             <p14:sldId id="260"/>
           </p14:sldIdLst>
         </p14:section>
-        <p14:section name="서비스 화면 및 사례" id="{db1e1614-4ea6-3dbf-530d-01fd11084c29}">
+        <p14:section name="서비스 화면 및 사례" id="{3d52ba49-7da3-8134-b432-ce62921a4e79}">
           <p14:sldIdLst>
             <p14:sldId id="261"/>
             <p14:sldId id="262"/>
             <p14:sldId id="263"/>
           </p14:sldIdLst>
         </p14:section>
-        <p14:section name="AI 모델과 활용 방안" id="{caff66c9-53a6-0f51-c415-6302535297a7}">
+        <p14:section name="AI 모델과 활용 방안" id="{dbaa5963-3ce0-8613-410d-07143ed9d1fd}">
           <p14:sldIdLst>
             <p14:sldId id="264"/>
             <p14:sldId id="265"/>
@@ -1656,7 +1656,7 @@
                   <a:schemeClr val="accent6"/>
                 </a:solidFill>
               </a:rPr>
-              <a:t>문서 규칙 점검기 · AI 활용 과제</a:t>
+              <a:t>문서 규칙 점검기 · AI의산업현장적용 중간평가</a:t>
             </a:r>
             <a:endParaRPr lang="en-US" sz="1000" dirty="0"/>
           </a:p>
@@ -2126,7 +2126,7 @@
                   <a:schemeClr val="bg2"/>
                 </a:solidFill>
               </a:rPr>
-              <a:t>사내 문서 작성 규칙 자동 점검 서비스 — AI 활용 프로토타입</a:t>
+              <a:t>사내 문서 작성 규칙 자동 점검 서비스</a:t>
             </a:r>
             <a:endParaRPr lang="en-US" sz="1800" dirty="0"/>
           </a:p>
@@ -2216,7 +2216,7 @@
                   <a:srgbClr val="CADCFC"/>
                 </a:solidFill>
               </a:rPr>
-              <a:t>AI 활용 과제 · 2026.10</a:t>
+              <a:t>AI의산업현장적용 중간평가 · 2026.10</a:t>
             </a:r>
             <a:endParaRPr lang="en-US" sz="1400" dirty="0"/>
           </a:p>
